--- a/Presentatie.pptx
+++ b/Presentatie.pptx
@@ -11,6 +11,7 @@
     <p:sldId id="260" r:id="rId5"/>
     <p:sldId id="261" r:id="rId6"/>
     <p:sldId id="258" r:id="rId7"/>
+    <p:sldId id="262" r:id="rId8"/>
   </p:sldIdLst>
   <p:sldSz cx="12192000" cy="6858000"/>
   <p:notesSz cx="6858000" cy="9144000"/>
@@ -120,6 +121,7 @@
 <file path=ppt/revisionInfo.xml><?xml version="1.0" encoding="utf-8"?>
 <p1510:revInfo xmlns:a="http://schemas.openxmlformats.org/drawingml/2006/main" xmlns:r="http://schemas.openxmlformats.org/officeDocument/2006/relationships" xmlns:p1510="http://schemas.microsoft.com/office/powerpoint/2015/10/main">
   <p1510:revLst>
+    <p1510:client id="{EA80201C-A532-A0FD-3FCB-6D2436824AE7}" v="196" dt="2026-05-21T10:07:59.126"/>
     <p1510:client id="{F3825430-FF80-99DA-FC41-765D8BCAE73D}" v="288" dt="2026-05-21T08:22:58.469"/>
   </p1510:revLst>
 </p1510:revInfo>
@@ -4570,6 +4572,189 @@
 </p:sld>
 </file>
 
+<file path=ppt/slides/slide7.xml><?xml version="1.0" encoding="utf-8"?>
+<p:sld xmlns:a="http://schemas.openxmlformats.org/drawingml/2006/main" xmlns:r="http://schemas.openxmlformats.org/officeDocument/2006/relationships" xmlns:p="http://schemas.openxmlformats.org/presentationml/2006/main">
+  <p:cSld>
+    <p:spTree>
+      <p:nvGrpSpPr>
+        <p:cNvPr id="1" name=""/>
+        <p:cNvGrpSpPr/>
+        <p:nvPr/>
+      </p:nvGrpSpPr>
+      <p:grpSpPr>
+        <a:xfrm>
+          <a:off x="0" y="0"/>
+          <a:ext cx="0" cy="0"/>
+          <a:chOff x="0" y="0"/>
+          <a:chExt cx="0" cy="0"/>
+        </a:xfrm>
+      </p:grpSpPr>
+      <p:sp>
+        <p:nvSpPr>
+          <p:cNvPr id="2" name="Title 1">
+            <a:extLst>
+              <a:ext uri="{FF2B5EF4-FFF2-40B4-BE49-F238E27FC236}">
+                <a16:creationId xmlns:a16="http://schemas.microsoft.com/office/drawing/2014/main" id="{73735AB8-5262-1761-B4E4-F3E746B79CF1}"/>
+              </a:ext>
+            </a:extLst>
+          </p:cNvPr>
+          <p:cNvSpPr>
+            <a:spLocks noGrp="1"/>
+          </p:cNvSpPr>
+          <p:nvPr>
+            <p:ph type="title"/>
+          </p:nvPr>
+        </p:nvSpPr>
+        <p:spPr/>
+        <p:txBody>
+          <a:bodyPr/>
+          <a:lstStyle/>
+          <a:p>
+            <a:r>
+              <a:rPr lang="en-US" b="1" u="sng" dirty="0"/>
+              <a:t>Wat </a:t>
+            </a:r>
+            <a:r>
+              <a:rPr lang="en-US" b="1" u="sng" dirty="0" err="1"/>
+              <a:t>geleerd</a:t>
+            </a:r>
+            <a:r>
+              <a:rPr lang="en-US" b="1" u="sng" dirty="0"/>
+              <a:t> ? / </a:t>
+            </a:r>
+            <a:r>
+              <a:rPr lang="en-US" b="1" u="sng" dirty="0" err="1"/>
+              <a:t>uitdagingen</a:t>
+            </a:r>
+            <a:endParaRPr lang="en-US" b="1" u="sng" dirty="0"/>
+          </a:p>
+        </p:txBody>
+      </p:sp>
+      <p:sp>
+        <p:nvSpPr>
+          <p:cNvPr id="3" name="Content Placeholder 2">
+            <a:extLst>
+              <a:ext uri="{FF2B5EF4-FFF2-40B4-BE49-F238E27FC236}">
+                <a16:creationId xmlns:a16="http://schemas.microsoft.com/office/drawing/2014/main" id="{735415CB-8961-04D4-D3FC-32CC65C5BC17}"/>
+              </a:ext>
+            </a:extLst>
+          </p:cNvPr>
+          <p:cNvSpPr>
+            <a:spLocks noGrp="1"/>
+          </p:cNvSpPr>
+          <p:nvPr>
+            <p:ph idx="1"/>
+          </p:nvPr>
+        </p:nvSpPr>
+        <p:spPr/>
+        <p:txBody>
+          <a:bodyPr vert="horz" lIns="91440" tIns="45720" rIns="91440" bIns="45720" rtlCol="0" anchor="t">
+            <a:normAutofit/>
+          </a:bodyPr>
+          <a:lstStyle/>
+          <a:p>
+            <a:r>
+              <a:rPr lang="en-US" dirty="0" err="1"/>
+              <a:t>Kiezen</a:t>
+            </a:r>
+            <a:r>
+              <a:rPr lang="en-US" dirty="0"/>
+              <a:t> </a:t>
+            </a:r>
+            <a:r>
+              <a:rPr lang="en-US" dirty="0" err="1"/>
+              <a:t>voor</a:t>
+            </a:r>
+            <a:r>
+              <a:rPr lang="en-US" dirty="0"/>
+              <a:t> </a:t>
+            </a:r>
+            <a:r>
+              <a:rPr lang="en-US" dirty="0" err="1"/>
+              <a:t>tijdbesteding</a:t>
+            </a:r>
+            <a:r>
+              <a:rPr lang="en-US" dirty="0"/>
+              <a:t> / </a:t>
+            </a:r>
+            <a:r>
+              <a:rPr lang="en-US" dirty="0" err="1"/>
+              <a:t>prioriteiten</a:t>
+            </a:r>
+            <a:endParaRPr lang="en-US" dirty="0"/>
+          </a:p>
+          <a:p>
+            <a:r>
+              <a:rPr lang="en-US" dirty="0" err="1"/>
+              <a:t>Zelfstandig</a:t>
+            </a:r>
+            <a:r>
+              <a:rPr lang="en-US" dirty="0"/>
+              <a:t> taken </a:t>
+            </a:r>
+            <a:r>
+              <a:rPr lang="en-US" dirty="0" err="1"/>
+              <a:t>opstellen</a:t>
+            </a:r>
+          </a:p>
+          <a:p>
+            <a:endParaRPr lang="en-US" dirty="0"/>
+          </a:p>
+          <a:p>
+            <a:r>
+              <a:rPr lang="en-US" dirty="0" err="1"/>
+              <a:t>Vertrouwbaar</a:t>
+            </a:r>
+            <a:r>
+              <a:rPr lang="en-US" dirty="0"/>
+              <a:t> </a:t>
+            </a:r>
+            <a:r>
+              <a:rPr lang="en-US" dirty="0" err="1"/>
+              <a:t>testen</a:t>
+            </a:r>
+            <a:r>
+              <a:rPr lang="en-US" dirty="0"/>
+              <a:t> </a:t>
+            </a:r>
+            <a:r>
+              <a:rPr lang="en-US" dirty="0" err="1"/>
+              <a:t>uitvoeren</a:t>
+            </a:r>
+            <a:endParaRPr lang="en-US" dirty="0"/>
+          </a:p>
+          <a:p>
+            <a:pPr lvl="1">
+              <a:buFont typeface="Courier New" panose="020B0604020202020204" pitchFamily="34" charset="0"/>
+              <a:buChar char="o"/>
+            </a:pPr>
+            <a:r>
+              <a:rPr lang="en-US" dirty="0" err="1"/>
+              <a:t>Opstelling</a:t>
+            </a:r>
+            <a:r>
+              <a:rPr lang="en-US" dirty="0"/>
+              <a:t> / 3D print</a:t>
+            </a:r>
+          </a:p>
+          <a:p>
+            <a:endParaRPr lang="en-US" dirty="0"/>
+          </a:p>
+        </p:txBody>
+      </p:sp>
+    </p:spTree>
+    <p:extLst>
+      <p:ext uri="{BB962C8B-B14F-4D97-AF65-F5344CB8AC3E}">
+        <p14:creationId xmlns:p14="http://schemas.microsoft.com/office/powerpoint/2010/main" val="2287878298"/>
+      </p:ext>
+    </p:extLst>
+  </p:cSld>
+  <p:clrMapOvr>
+    <a:masterClrMapping/>
+  </p:clrMapOvr>
+</p:sld>
+</file>
+
 <file path=ppt/theme/theme1.xml><?xml version="1.0" encoding="utf-8"?>
 <a:theme xmlns:a="http://schemas.openxmlformats.org/drawingml/2006/main" name="office theme">
   <a:themeElements>
